--- a/2026-Q1/Righteousness9/2026-03-08-Righteous-9.pptx
+++ b/2026-Q1/Righteousness9/2026-03-08-Righteous-9.pptx
@@ -676,7 +676,7 @@
         <p:spPr/>
         <p:txBody>
           <a:bodyPr>
-            <a:normAutofit fontScale="92500" lnSpcReduction="20000"/>
+            <a:normAutofit/>
           </a:bodyPr>
           <a:lstStyle/>
           <a:p>
@@ -3818,7 +3818,7 @@
           <a:p>
             <a:r>
               <a:rPr lang="en-US" dirty="0"/>
-              <a:t>The Gospel Movements in the Arc of God’s Righteousness</a:t>
+              <a:t>Gospel Movements in the Arc of God’s Righteousness</a:t>
             </a:r>
           </a:p>
           <a:p>
@@ -6692,7 +6692,7 @@
             </a:r>
             <a:r>
               <a:rPr lang="en-US" i="1" dirty="0"/>
-              <a:t>You were taught with reference to your former way of life to lay aside the old man who is being corrupted in accordance with deceitful desires,  to be renewed in the spirit of your mind,  and to put on the new man who has been created in God’s image – in righteousness and holiness that comes from truth.</a:t>
+              <a:t>You were taught with reference to your former way of life to lay aside the old man who is being corrupted in accordance with deceitful desires, to be renewed in the spirit of your mind, and to put on the new man who has been created in God’s image – in righteousness and holiness that comes from truth.</a:t>
             </a:r>
           </a:p>
         </p:txBody>
@@ -7187,7 +7187,7 @@
         </p:nvSpPr>
         <p:spPr>
           <a:xfrm>
-            <a:off x="309562" y="2514600"/>
+            <a:off x="287634" y="2514600"/>
             <a:ext cx="8605838" cy="1477328"/>
           </a:xfrm>
           <a:prstGeom prst="rect">

--- a/2026-Q1/Righteousness9/2026-03-08-Righteous-9.pptx
+++ b/2026-Q1/Righteousness9/2026-03-08-Righteous-9.pptx
@@ -279,7 +279,7 @@
               <a:pPr>
                 <a:defRPr/>
               </a:pPr>
-              <a:t>3/7/2026</a:t>
+              <a:t>3/8/2026</a:t>
             </a:fld>
             <a:endParaRPr lang="en-US"/>
           </a:p>
@@ -5125,7 +5125,15 @@
             </a:r>
             <a:r>
               <a:rPr lang="en-US" i="1" dirty="0"/>
-              <a:t>Therefore, since we have been declared righteous by faith, we have peace with God through our Lord Jesus Christ…</a:t>
+              <a:t>Therefore, since we have been </a:t>
+            </a:r>
+            <a:r>
+              <a:rPr lang="en-US" i="1" u="sng" dirty="0"/>
+              <a:t>declared righteous by faith</a:t>
+            </a:r>
+            <a:r>
+              <a:rPr lang="en-US" i="1" dirty="0"/>
+              <a:t>, we have peace with God through our Lord Jesus Christ…</a:t>
             </a:r>
           </a:p>
           <a:p>
@@ -5138,7 +5146,15 @@
             </a:r>
             <a:r>
               <a:rPr lang="en-US" i="1" dirty="0"/>
-              <a:t>But “when the kindness of God our Savior and his love for mankind appeared, he saved us not by works of righteousness that we have done but on the basis of his mercy, through the washing of the new birth and the renewing of the Holy Spirit, whom he poured out on us in full measure through Jesus Christ our Savior. And so, since we have been justified by his grace, we become heirs with the confident expectation of eternal life.”</a:t>
+              <a:t>But “when the kindness of God our Savior and his love for mankind appeared, he saved us not by works of righteousness that we have done but on the basis of his mercy, through the washing of the new birth and the renewing of the Holy Spirit, whom he poured out on us in full measure through Jesus Christ our Savior. And so, </a:t>
+            </a:r>
+            <a:r>
+              <a:rPr lang="en-US" i="1" u="sng" dirty="0"/>
+              <a:t>since we have been justified by his grace</a:t>
+            </a:r>
+            <a:r>
+              <a:rPr lang="en-US" i="1" dirty="0"/>
+              <a:t>, we become heirs with the confident expectation of eternal life.”</a:t>
             </a:r>
           </a:p>
         </p:txBody>
@@ -5904,7 +5920,23 @@
             </a:r>
             <a:r>
               <a:rPr lang="en-US" i="1" dirty="0"/>
-              <a:t>Jesus replied, “I tell you the solemn truth, unless a person is born from above, he cannot see the kingdom of God.”  Nicodemus said to him, “How can a man be born when he is old? He cannot enter his mother’s womb and be born a second time, can he?”  Jesus answered, “I tell you the solemn truth, unless a person is born of water and spirit, he cannot enter the kingdom of God.  What is born of the flesh is flesh, and what is born of the Spirit is spirit.</a:t>
+              <a:t>Jesus replied, “I tell you the solemn truth, </a:t>
+            </a:r>
+            <a:r>
+              <a:rPr lang="en-US" i="1" u="sng" dirty="0"/>
+              <a:t>unless a person is born from above</a:t>
+            </a:r>
+            <a:r>
+              <a:rPr lang="en-US" i="1" dirty="0"/>
+              <a:t>, he cannot see the kingdom of God.”  Nicodemus said to him, “How can a man be born when he is old? He cannot enter his mother’s womb and be born a second time, can he?”  Jesus answered, “I tell you the solemn truth, </a:t>
+            </a:r>
+            <a:r>
+              <a:rPr lang="en-US" i="1" u="sng" dirty="0"/>
+              <a:t>unless a person is born of water and spirit</a:t>
+            </a:r>
+            <a:r>
+              <a:rPr lang="en-US" i="1" dirty="0"/>
+              <a:t>, he cannot enter the kingdom of God.  What is born of the flesh is flesh, and what is born of the Spirit is spirit.</a:t>
             </a:r>
           </a:p>
           <a:p>
@@ -5916,8 +5948,12 @@
               <a:t>1 Peter 1:23  </a:t>
             </a:r>
             <a:r>
+              <a:rPr lang="en-US" i="1" u="sng" dirty="0"/>
+              <a:t>You have been born anew</a:t>
+            </a:r>
+            <a:r>
               <a:rPr lang="en-US" i="1" dirty="0"/>
-              <a:t>You have been born anew, not from perishable but from imperishable seed, through the living and enduring word of God.</a:t>
+              <a:t>, not from perishable but from imperishable seed, through the living and enduring word of God.</a:t>
             </a:r>
           </a:p>
         </p:txBody>
@@ -6679,7 +6715,15 @@
             </a:r>
             <a:r>
               <a:rPr lang="en-US" i="1" dirty="0"/>
-              <a:t>For the death he died, he died to sin once for all, but the life he lives, he lives to God.  So, you too consider yourselves dead to sin, but alive to God in Christ Jesus.  Therefore, do not let sin reign in your mortal body so that you obey its desires,  and do not present your members to sin as instruments to be used for unrighteousness, but present yourselves to God as those who are alive from the dead and your members to God as instruments to be used for righteousness.  For sin will have no mastery over you, because you are not under law but under grace.</a:t>
+              <a:t>For the death he died, he died to sin once for all, but the life he lives, he lives to God.  So, you too consider yourselves dead to sin, but alive to God in Christ Jesus.  Therefore, do not let sin reign in your mortal body so that you obey its desires,  and do not present your members to sin as instruments to be used for unrighteousness, but </a:t>
+            </a:r>
+            <a:r>
+              <a:rPr lang="en-US" i="1" u="sng" dirty="0"/>
+              <a:t>present yourselves to God as those who are alive from the dead and your members to God as instruments to be used for righteousness</a:t>
+            </a:r>
+            <a:r>
+              <a:rPr lang="en-US" i="1" dirty="0"/>
+              <a:t>.  For sin will have no mastery over you, because you are not under law but under grace.</a:t>
             </a:r>
           </a:p>
           <a:p>
@@ -6692,7 +6736,23 @@
             </a:r>
             <a:r>
               <a:rPr lang="en-US" i="1" dirty="0"/>
-              <a:t>You were taught with reference to your former way of life to lay aside the old man who is being corrupted in accordance with deceitful desires, to be renewed in the spirit of your mind, and to put on the new man who has been created in God’s image – in righteousness and holiness that comes from truth.</a:t>
+              <a:t>You were taught with reference to your former way of life to lay aside the old man who is being corrupted in accordance with deceitful desires, to be </a:t>
+            </a:r>
+            <a:r>
+              <a:rPr lang="en-US" i="1" u="sng" dirty="0"/>
+              <a:t>renewed in the spirit of your mind</a:t>
+            </a:r>
+            <a:r>
+              <a:rPr lang="en-US" i="1" dirty="0"/>
+              <a:t>, and to </a:t>
+            </a:r>
+            <a:r>
+              <a:rPr lang="en-US" i="1" u="sng" dirty="0"/>
+              <a:t>put on the new man </a:t>
+            </a:r>
+            <a:r>
+              <a:rPr lang="en-US" i="1" dirty="0"/>
+              <a:t>who has been created in God’s image – in righteousness and holiness that comes from truth.</a:t>
             </a:r>
           </a:p>
         </p:txBody>
